--- a/section2_tdma_protocol.pptx
+++ b/section2_tdma_protocol.pptx
@@ -1388,6 +1388,13 @@
 <file path=ppt/slides/slide1.xml><?xml version="1.0" encoding="utf-8"?>
 <p:sld xmlns:a="http://schemas.openxmlformats.org/drawingml/2006/main" xmlns:r="http://schemas.openxmlformats.org/officeDocument/2006/relationships" xmlns:p="http://schemas.openxmlformats.org/presentationml/2006/main">
   <p:cSld name="Slide 1">
+    <p:bg>
+      <p:bgPr>
+        <a:solidFill>
+          <a:srgbClr val="F2F2F2"/>
+        </a:solidFill>
+      </p:bgPr>
+    </p:bg>
     <p:spTree>
       <p:nvGrpSpPr>
         <p:cNvPr id="1" name=""/>
@@ -1410,8 +1417,8 @@
         </p:nvSpPr>
         <p:spPr>
           <a:xfrm>
-            <a:off x="548640" y="1554480"/>
-            <a:ext cx="8046720" cy="1188720"/>
+            <a:off x="548640" y="1828800"/>
+            <a:ext cx="8046720" cy="1371600"/>
           </a:xfrm>
           <a:prstGeom prst="rect">
             <a:avLst/>
@@ -1435,7 +1442,7 @@
                 <a:ea typeface="Noto Sans CJK KR" pitchFamily="34" charset="-122"/>
                 <a:cs typeface="Noto Sans CJK KR" pitchFamily="34" charset="-120"/>
               </a:rPr>
-              <a:t>TDMA PHY · Datalink · 프로토콜 정의</a:t>
+              <a:t>2. TDMA PHY · Datalink · 프로토콜 정의</a:t>
             </a:r>
             <a:endParaRPr lang="en-US" sz="4000" dirty="0"/>
           </a:p>
@@ -1449,8 +1456,8 @@
         </p:nvSpPr>
         <p:spPr>
           <a:xfrm>
-            <a:off x="548640" y="2788920"/>
-            <a:ext cx="8046720" cy="594360"/>
+            <a:off x="548640" y="3108960"/>
+            <a:ext cx="8046720" cy="457200"/>
           </a:xfrm>
           <a:prstGeom prst="rect">
             <a:avLst/>
@@ -1693,9 +1700,9 @@
               <a:buChar char="•"/>
             </a:pPr>
             <a:r>
-              <a:rPr lang="en-US" sz="1700" dirty="0">
-                <a:solidFill>
-                  <a:srgbClr val="444444"/>
+              <a:rPr lang="en-US" sz="2000" dirty="0">
+                <a:solidFill>
+                  <a:srgbClr val="222222"/>
                 </a:solidFill>
                 <a:latin typeface="Noto Sans CJK KR" pitchFamily="34" charset="0"/>
                 <a:ea typeface="Noto Sans CJK KR" pitchFamily="34" charset="-122"/>
@@ -1819,7 +1826,7 @@
         <p:spPr>
           <a:xfrm>
             <a:off x="548640" y="1234440"/>
-            <a:ext cx="8046720" cy="2971800"/>
+            <a:ext cx="4023360" cy="3200400"/>
           </a:xfrm>
           <a:prstGeom prst="rect">
             <a:avLst/>
@@ -1949,15 +1956,77 @@
                 <a:ea typeface="Noto Sans CJK KR" pitchFamily="34" charset="-122"/>
                 <a:cs typeface="Noto Sans CJK KR" pitchFamily="34" charset="-120"/>
               </a:rPr>
-              <a:t>TX 1선 + RX 1선 + 공통 GND = 3선. 각 선은 단일 드라이버 단방향, TX/RX 합쳐 반이중 통신</a:t>
+              <a:t>TX 1선 + RX 1선 + 공통 GND = 3선, 각 선은 단일 드라이버 단방향</a:t>
             </a:r>
             <a:endParaRPr lang="en-US" sz="2000" dirty="0"/>
           </a:p>
         </p:txBody>
       </p:sp>
-      <p:sp>
-        <p:nvSpPr>
-          <p:cNvPr id="4" name="Text 2"/>
+      <p:pic>
+        <p:nvPicPr>
+          <p:cNvPr id="4" name="Image 0" descr="/home/user/SoC_Design_and_Programming/diagrams/phy_wiring.png">    </p:cNvPr>
+          <p:cNvPicPr>
+            <a:picLocks noChangeAspect="1"/>
+          </p:cNvPicPr>
+          <p:nvPr/>
+        </p:nvPicPr>
+        <p:blipFill>
+          <a:blip r:embed="rId1"/>
+          <a:srcRect l="0" r="0" t="0" b="0"/>
+          <a:stretch/>
+        </p:blipFill>
+        <p:spPr>
+          <a:xfrm>
+            <a:off x="4846320" y="2377440"/>
+            <a:ext cx="3657600" cy="1125415"/>
+          </a:xfrm>
+          <a:prstGeom prst="rect">
+            <a:avLst/>
+          </a:prstGeom>
+        </p:spPr>
+      </p:pic>
+      <p:sp>
+        <p:nvSpPr>
+          <p:cNvPr id="5" name="Text 2"/>
+          <p:cNvSpPr/>
+          <p:nvPr/>
+        </p:nvSpPr>
+        <p:spPr>
+          <a:xfrm>
+            <a:off x="4846320" y="3703320"/>
+            <a:ext cx="3657600" cy="274320"/>
+          </a:xfrm>
+          <a:prstGeom prst="rect">
+            <a:avLst/>
+          </a:prstGeom>
+          <a:noFill/>
+          <a:ln/>
+        </p:spPr>
+        <p:txBody>
+          <a:bodyPr wrap="square" rtlCol="0" anchor="ctr"/>
+          <a:lstStyle/>
+          <a:p>
+            <a:pPr algn="ctr" indent="0" marL="0">
+              <a:buNone/>
+            </a:pPr>
+            <a:r>
+              <a:rPr lang="en-US" sz="900" dirty="0">
+                <a:solidFill>
+                  <a:srgbClr val="999999"/>
+                </a:solidFill>
+                <a:latin typeface="Noto Sans CJK KR" pitchFamily="34" charset="0"/>
+                <a:ea typeface="Noto Sans CJK KR" pitchFamily="34" charset="-122"/>
+                <a:cs typeface="Noto Sans CJK KR" pitchFamily="34" charset="-120"/>
+              </a:rPr>
+              <a:t>Master ↔ Slave TX/RX 배선 구조</a:t>
+            </a:r>
+            <a:endParaRPr lang="en-US" sz="900" dirty="0"/>
+          </a:p>
+        </p:txBody>
+      </p:sp>
+      <p:sp>
+        <p:nvSpPr>
+          <p:cNvPr id="6" name="Text 3"/>
           <p:cNvSpPr/>
           <p:nvPr/>
         </p:nvSpPr>
@@ -2067,7 +2136,7 @@
         <p:spPr>
           <a:xfrm>
             <a:off x="548640" y="1234440"/>
-            <a:ext cx="8046720" cy="2971800"/>
+            <a:ext cx="8046720" cy="2103120"/>
           </a:xfrm>
           <a:prstGeom prst="rect">
             <a:avLst/>
@@ -2081,7 +2150,7 @@
           <a:p>
             <a:pPr marL="342900" indent="-342900">
               <a:spcAft>
-                <a:spcPts val="1200"/>
+                <a:spcPts val="1000"/>
               </a:spcAft>
               <a:buSzPct val="100000"/>
               <a:buChar char="•"/>
@@ -2123,7 +2192,7 @@
           <a:p>
             <a:pPr marL="342900" indent="-342900">
               <a:spcAft>
-                <a:spcPts val="1200"/>
+                <a:spcPts val="1000"/>
               </a:spcAft>
               <a:buSzPct val="100000"/>
               <a:buChar char="•"/>
@@ -2165,7 +2234,7 @@
           <a:p>
             <a:pPr marL="342900" indent="-342900">
               <a:spcAft>
-                <a:spcPts val="1200"/>
+                <a:spcPts val="1000"/>
               </a:spcAft>
               <a:buSzPct val="100000"/>
               <a:buChar char="•"/>
@@ -2203,9 +2272,71 @@
           </a:p>
         </p:txBody>
       </p:sp>
-      <p:sp>
-        <p:nvSpPr>
-          <p:cNvPr id="4" name="Text 2"/>
+      <p:pic>
+        <p:nvPicPr>
+          <p:cNvPr id="4" name="Image 0" descr="/home/user/SoC_Design_and_Programming/diagrams/slave_frame.png">    </p:cNvPr>
+          <p:cNvPicPr>
+            <a:picLocks noChangeAspect="1"/>
+          </p:cNvPicPr>
+          <p:nvPr/>
+        </p:nvPicPr>
+        <p:blipFill>
+          <a:blip r:embed="rId1"/>
+          <a:srcRect l="0" r="0" t="0" b="0"/>
+          <a:stretch/>
+        </p:blipFill>
+        <p:spPr>
+          <a:xfrm>
+            <a:off x="548640" y="3429000"/>
+            <a:ext cx="8046720" cy="563270"/>
+          </a:xfrm>
+          <a:prstGeom prst="rect">
+            <a:avLst/>
+          </a:prstGeom>
+        </p:spPr>
+      </p:pic>
+      <p:sp>
+        <p:nvSpPr>
+          <p:cNvPr id="5" name="Text 2"/>
+          <p:cNvSpPr/>
+          <p:nvPr/>
+        </p:nvSpPr>
+        <p:spPr>
+          <a:xfrm>
+            <a:off x="548640" y="4065422"/>
+            <a:ext cx="8046720" cy="228600"/>
+          </a:xfrm>
+          <a:prstGeom prst="rect">
+            <a:avLst/>
+          </a:prstGeom>
+          <a:noFill/>
+          <a:ln/>
+        </p:spPr>
+        <p:txBody>
+          <a:bodyPr wrap="square" rtlCol="0" anchor="ctr"/>
+          <a:lstStyle/>
+          <a:p>
+            <a:pPr algn="ctr" indent="0" marL="0">
+              <a:buNone/>
+            </a:pPr>
+            <a:r>
+              <a:rPr lang="en-US" sz="900" dirty="0">
+                <a:solidFill>
+                  <a:srgbClr val="999999"/>
+                </a:solidFill>
+                <a:latin typeface="Noto Sans CJK KR" pitchFamily="34" charset="0"/>
+                <a:ea typeface="Noto Sans CJK KR" pitchFamily="34" charset="-122"/>
+                <a:cs typeface="Noto Sans CJK KR" pitchFamily="34" charset="-120"/>
+              </a:rPr>
+              <a:t>Slave 프레임 비트필드 (MSB 좌측, bit 49→0)</a:t>
+            </a:r>
+            <a:endParaRPr lang="en-US" sz="900" dirty="0"/>
+          </a:p>
+        </p:txBody>
+      </p:sp>
+      <p:sp>
+        <p:nvSpPr>
+          <p:cNvPr id="6" name="Text 3"/>
           <p:cNvSpPr/>
           <p:nvPr/>
         </p:nvSpPr>
@@ -2315,7 +2446,7 @@
         <p:spPr>
           <a:xfrm>
             <a:off x="548640" y="1234440"/>
-            <a:ext cx="8046720" cy="2971800"/>
+            <a:ext cx="8046720" cy="2377440"/>
           </a:xfrm>
           <a:prstGeom prst="rect">
             <a:avLst/>
@@ -2329,7 +2460,7 @@
           <a:p>
             <a:pPr marL="342900" indent="-342900">
               <a:spcAft>
-                <a:spcPts val="1200"/>
+                <a:spcPts val="1000"/>
               </a:spcAft>
               <a:buSzPct val="100000"/>
               <a:buChar char="•"/>
@@ -2371,7 +2502,7 @@
           <a:p>
             <a:pPr marL="342900" indent="-342900">
               <a:spcAft>
-                <a:spcPts val="1200"/>
+                <a:spcPts val="1000"/>
               </a:spcAft>
               <a:buSzPct val="100000"/>
               <a:buChar char="•"/>
@@ -2413,7 +2544,7 @@
           <a:p>
             <a:pPr marL="342900" indent="-342900">
               <a:spcAft>
-                <a:spcPts val="1200"/>
+                <a:spcPts val="1000"/>
               </a:spcAft>
               <a:buSzPct val="100000"/>
               <a:buChar char="•"/>
@@ -2451,9 +2582,71 @@
           </a:p>
         </p:txBody>
       </p:sp>
-      <p:sp>
-        <p:nvSpPr>
-          <p:cNvPr id="4" name="Text 2"/>
+      <p:pic>
+        <p:nvPicPr>
+          <p:cNvPr id="4" name="Image 0" descr="/home/user/SoC_Design_and_Programming/diagrams/master_frame.png">    </p:cNvPr>
+          <p:cNvPicPr>
+            <a:picLocks noChangeAspect="1"/>
+          </p:cNvPicPr>
+          <p:nvPr/>
+        </p:nvPicPr>
+        <p:blipFill>
+          <a:blip r:embed="rId1"/>
+          <a:srcRect l="0" r="0" t="0" b="0"/>
+          <a:stretch/>
+        </p:blipFill>
+        <p:spPr>
+          <a:xfrm>
+            <a:off x="548640" y="3611880"/>
+            <a:ext cx="8046720" cy="563270"/>
+          </a:xfrm>
+          <a:prstGeom prst="rect">
+            <a:avLst/>
+          </a:prstGeom>
+        </p:spPr>
+      </p:pic>
+      <p:sp>
+        <p:nvSpPr>
+          <p:cNvPr id="5" name="Text 2"/>
+          <p:cNvSpPr/>
+          <p:nvPr/>
+        </p:nvSpPr>
+        <p:spPr>
+          <a:xfrm>
+            <a:off x="548640" y="4248302"/>
+            <a:ext cx="8046720" cy="228600"/>
+          </a:xfrm>
+          <a:prstGeom prst="rect">
+            <a:avLst/>
+          </a:prstGeom>
+          <a:noFill/>
+          <a:ln/>
+        </p:spPr>
+        <p:txBody>
+          <a:bodyPr wrap="square" rtlCol="0" anchor="ctr"/>
+          <a:lstStyle/>
+          <a:p>
+            <a:pPr algn="ctr" indent="0" marL="0">
+              <a:buNone/>
+            </a:pPr>
+            <a:r>
+              <a:rPr lang="en-US" sz="900" dirty="0">
+                <a:solidFill>
+                  <a:srgbClr val="999999"/>
+                </a:solidFill>
+                <a:latin typeface="Noto Sans CJK KR" pitchFamily="34" charset="0"/>
+                <a:ea typeface="Noto Sans CJK KR" pitchFamily="34" charset="-122"/>
+                <a:cs typeface="Noto Sans CJK KR" pitchFamily="34" charset="-120"/>
+              </a:rPr>
+              <a:t>Master 프레임 비트필드 (MSB 좌측, bit 49→0)</a:t>
+            </a:r>
+            <a:endParaRPr lang="en-US" sz="900" dirty="0"/>
+          </a:p>
+        </p:txBody>
+      </p:sp>
+      <p:sp>
+        <p:nvSpPr>
+          <p:cNvPr id="6" name="Text 3"/>
           <p:cNvSpPr/>
           <p:nvPr/>
         </p:nvSpPr>
@@ -2563,7 +2756,7 @@
         <p:spPr>
           <a:xfrm>
             <a:off x="548640" y="1234440"/>
-            <a:ext cx="8046720" cy="2971800"/>
+            <a:ext cx="8046720" cy="2377440"/>
           </a:xfrm>
           <a:prstGeom prst="rect">
             <a:avLst/>
@@ -2577,7 +2770,7 @@
           <a:p>
             <a:pPr marL="342900" indent="-342900">
               <a:spcAft>
-                <a:spcPts val="1200"/>
+                <a:spcPts val="1000"/>
               </a:spcAft>
               <a:buSzPct val="100000"/>
               <a:buChar char="•"/>
@@ -2619,7 +2812,7 @@
           <a:p>
             <a:pPr marL="342900" indent="-342900">
               <a:spcAft>
-                <a:spcPts val="1200"/>
+                <a:spcPts val="1000"/>
               </a:spcAft>
               <a:buSzPct val="100000"/>
               <a:buChar char="•"/>
@@ -2661,7 +2854,7 @@
           <a:p>
             <a:pPr marL="342900" indent="-342900">
               <a:spcAft>
-                <a:spcPts val="1200"/>
+                <a:spcPts val="1000"/>
               </a:spcAft>
               <a:buSzPct val="100000"/>
               <a:buChar char="•"/>
@@ -2699,9 +2892,71 @@
           </a:p>
         </p:txBody>
       </p:sp>
-      <p:sp>
-        <p:nvSpPr>
-          <p:cNvPr id="4" name="Text 2"/>
+      <p:pic>
+        <p:nvPicPr>
+          <p:cNvPr id="4" name="Image 0" descr="/home/user/SoC_Design_and_Programming/diagrams/slot_timeline.png">    </p:cNvPr>
+          <p:cNvPicPr>
+            <a:picLocks noChangeAspect="1"/>
+          </p:cNvPicPr>
+          <p:nvPr/>
+        </p:nvPicPr>
+        <p:blipFill>
+          <a:blip r:embed="rId1"/>
+          <a:srcRect l="0" r="0" t="0" b="0"/>
+          <a:stretch/>
+        </p:blipFill>
+        <p:spPr>
+          <a:xfrm>
+            <a:off x="640080" y="3611880"/>
+            <a:ext cx="7863840" cy="613678"/>
+          </a:xfrm>
+          <a:prstGeom prst="rect">
+            <a:avLst/>
+          </a:prstGeom>
+        </p:spPr>
+      </p:pic>
+      <p:sp>
+        <p:nvSpPr>
+          <p:cNvPr id="5" name="Text 2"/>
+          <p:cNvSpPr/>
+          <p:nvPr/>
+        </p:nvSpPr>
+        <p:spPr>
+          <a:xfrm>
+            <a:off x="548640" y="4298710"/>
+            <a:ext cx="8046720" cy="228600"/>
+          </a:xfrm>
+          <a:prstGeom prst="rect">
+            <a:avLst/>
+          </a:prstGeom>
+          <a:noFill/>
+          <a:ln/>
+        </p:spPr>
+        <p:txBody>
+          <a:bodyPr wrap="square" rtlCol="0" anchor="ctr"/>
+          <a:lstStyle/>
+          <a:p>
+            <a:pPr algn="ctr" indent="0" marL="0">
+              <a:buNone/>
+            </a:pPr>
+            <a:r>
+              <a:rPr lang="en-US" sz="900" dirty="0">
+                <a:solidFill>
+                  <a:srgbClr val="999999"/>
+                </a:solidFill>
+                <a:latin typeface="Noto Sans CJK KR" pitchFamily="34" charset="0"/>
+                <a:ea typeface="Noto Sans CJK KR" pitchFamily="34" charset="-122"/>
+                <a:cs typeface="Noto Sans CJK KR" pitchFamily="34" charset="-120"/>
+              </a:rPr>
+              <a:t>슬롯/가드틱 타임라인 (Slot 0 ... Slot N → Sync)</a:t>
+            </a:r>
+            <a:endParaRPr lang="en-US" sz="900" dirty="0"/>
+          </a:p>
+        </p:txBody>
+      </p:sp>
+      <p:sp>
+        <p:nvSpPr>
+          <p:cNvPr id="6" name="Text 3"/>
           <p:cNvSpPr/>
           <p:nvPr/>
         </p:nvSpPr>
@@ -2811,7 +3066,7 @@
         <p:spPr>
           <a:xfrm>
             <a:off x="548640" y="1234440"/>
-            <a:ext cx="8046720" cy="2971800"/>
+            <a:ext cx="4023360" cy="2971800"/>
           </a:xfrm>
           <a:prstGeom prst="rect">
             <a:avLst/>
@@ -2947,9 +3202,32 @@
           </a:p>
         </p:txBody>
       </p:sp>
-      <p:sp>
-        <p:nvSpPr>
-          <p:cNvPr id="4" name="Text 2"/>
+      <p:pic>
+        <p:nvPicPr>
+          <p:cNvPr id="4" name="Image 0" descr="/home/user/SoC_Design_and_Programming/diagrams/flow_control.png">    </p:cNvPr>
+          <p:cNvPicPr>
+            <a:picLocks noChangeAspect="1"/>
+          </p:cNvPicPr>
+          <p:nvPr/>
+        </p:nvPicPr>
+        <p:blipFill>
+          <a:blip r:embed="rId1"/>
+          <a:srcRect l="0" r="0" t="0" b="0"/>
+          <a:stretch/>
+        </p:blipFill>
+        <p:spPr>
+          <a:xfrm>
+            <a:off x="5029200" y="1371600"/>
+            <a:ext cx="3200400" cy="2319606"/>
+          </a:xfrm>
+          <a:prstGeom prst="rect">
+            <a:avLst/>
+          </a:prstGeom>
+        </p:spPr>
+      </p:pic>
+      <p:sp>
+        <p:nvSpPr>
+          <p:cNvPr id="5" name="Text 2"/>
           <p:cNvSpPr/>
           <p:nvPr/>
         </p:nvSpPr>

--- a/section2_tdma_protocol.pptx
+++ b/section2_tdma_protocol.pptx
@@ -1875,7 +1875,7 @@
                 <a:ea typeface="Noto Sans CJK KR" pitchFamily="34" charset="-122"/>
                 <a:cs typeface="Noto Sans CJK KR" pitchFamily="34" charset="-120"/>
               </a:rPr>
-              <a:t>GPIO 단자 기반 직결 케이블, Master-Slave 1:1 토폴로지</a:t>
+              <a:t>GPIO 단자 기반 공유 버스, Master 1 : Slave N (NODE_CNT)</a:t>
             </a:r>
             <a:endParaRPr lang="en-US" sz="2000" dirty="0"/>
           </a:p>
@@ -1956,7 +1956,7 @@
                 <a:ea typeface="Noto Sans CJK KR" pitchFamily="34" charset="-122"/>
                 <a:cs typeface="Noto Sans CJK KR" pitchFamily="34" charset="-120"/>
               </a:rPr>
-              <a:t>TX 1선 + RX 1선 + 공통 GND = 3선, 각 선은 단일 드라이버 단방향</a:t>
+              <a:t>TX 1선 + RX 1선 + 공통 GND = 3선, 각 선은 단일 드라이버 단방향 — 슬레이브는 자신의 슬롯에만 TX 구동</a:t>
             </a:r>
             <a:endParaRPr lang="en-US" sz="2000" dirty="0"/>
           </a:p>
@@ -1977,8 +1977,8 @@
         </p:blipFill>
         <p:spPr>
           <a:xfrm>
-            <a:off x="4846320" y="2377440"/>
-            <a:ext cx="3657600" cy="1125415"/>
+            <a:off x="4937760" y="1280160"/>
+            <a:ext cx="3566160" cy="2985116"/>
           </a:xfrm>
           <a:prstGeom prst="rect">
             <a:avLst/>
@@ -1993,8 +1993,8 @@
         </p:nvSpPr>
         <p:spPr>
           <a:xfrm>
-            <a:off x="4846320" y="3703320"/>
-            <a:ext cx="3657600" cy="274320"/>
+            <a:off x="4937760" y="4338428"/>
+            <a:ext cx="3566160" cy="274320"/>
           </a:xfrm>
           <a:prstGeom prst="rect">
             <a:avLst/>
@@ -2018,7 +2018,7 @@
                 <a:ea typeface="Noto Sans CJK KR" pitchFamily="34" charset="-122"/>
                 <a:cs typeface="Noto Sans CJK KR" pitchFamily="34" charset="-120"/>
               </a:rPr>
-              <a:t>Master ↔ Slave TX/RX 배선 구조</a:t>
+              <a:t>Master ↔ Slave 1..N 공유 버스 배선 구조</a:t>
             </a:r>
             <a:endParaRPr lang="en-US" sz="900" dirty="0"/>
           </a:p>
@@ -2328,7 +2328,7 @@
                 <a:ea typeface="Noto Sans CJK KR" pitchFamily="34" charset="-122"/>
                 <a:cs typeface="Noto Sans CJK KR" pitchFamily="34" charset="-120"/>
               </a:rPr>
-              <a:t>Slave 프레임 비트필드 (MSB 좌측, bit 49→0)</a:t>
+              <a:t>Slave 프레임 비트필드 (전송 순서: preamble → slot_id → payload → hamming)</a:t>
             </a:r>
             <a:endParaRPr lang="en-US" sz="900" dirty="0"/>
           </a:p>
@@ -2638,7 +2638,7 @@
                 <a:ea typeface="Noto Sans CJK KR" pitchFamily="34" charset="-122"/>
                 <a:cs typeface="Noto Sans CJK KR" pitchFamily="34" charset="-120"/>
               </a:rPr>
-              <a:t>Master 프레임 비트필드 (MSB 좌측, bit 49→0)</a:t>
+              <a:t>Master 프레임 비트필드 (전송 순서: preamble → halt_cmd → guard_ticks → reserved → hamming)</a:t>
             </a:r>
             <a:endParaRPr lang="en-US" sz="900" dirty="0"/>
           </a:p>
@@ -2784,7 +2784,7 @@
                 <a:ea typeface="Noto Sans CJK KR" pitchFamily="34" charset="-122"/>
                 <a:cs typeface="Noto Sans CJK KR" pitchFamily="34" charset="-120"/>
               </a:rPr>
-              <a:t>Sync 전송</a:t>
+              <a:t>Sync 기준점</a:t>
             </a:r>
             <a:endParaRPr lang="en-US" sz="2000" dirty="0"/>
           </a:p>
@@ -2805,7 +2805,7 @@
                 <a:ea typeface="Noto Sans CJK KR" pitchFamily="34" charset="-122"/>
                 <a:cs typeface="Noto Sans CJK KR" pitchFamily="34" charset="-120"/>
               </a:rPr>
-              <a:t>Master는 매 사이클의 마지막 슬롯에서 sync 프레임을 전송해 다음 사이클을 예고</a:t>
+              <a:t>Master는 매 사이클의 마지막 슬롯에서 sync 프레임을 전송, 이를 다음 사이클의 슬롯 계산 기준점으로 사용</a:t>
             </a:r>
             <a:endParaRPr lang="en-US" sz="2000" dirty="0"/>
           </a:p>
@@ -2826,7 +2826,7 @@
                 <a:ea typeface="Noto Sans CJK KR" pitchFamily="34" charset="-122"/>
                 <a:cs typeface="Noto Sans CJK KR" pitchFamily="34" charset="-120"/>
               </a:rPr>
-              <a:t>슬롯 계산</a:t>
+              <a:t>슬롯 내부 구조</a:t>
             </a:r>
             <a:endParaRPr lang="en-US" sz="2000" dirty="0"/>
           </a:p>
@@ -2847,7 +2847,7 @@
                 <a:ea typeface="Noto Sans CJK KR" pitchFamily="34" charset="-122"/>
                 <a:cs typeface="Noto Sans CJK KR" pitchFamily="34" charset="-120"/>
               </a:rPr>
-              <a:t>각 Slave는 sync 수신 시점을 기준으로 자신의 슬롯 시작 시각을 계산 (슬롯 인덱스 × 슬롯 길이)</a:t>
+              <a:t>각 슬롯은 ½ guard tick 대기 → 데이터 전송 → ½ guard tick 대기 순으로 진행</a:t>
             </a:r>
             <a:endParaRPr lang="en-US" sz="2000" dirty="0"/>
           </a:p>
@@ -2868,7 +2868,7 @@
                 <a:ea typeface="Noto Sans CJK KR" pitchFamily="34" charset="-122"/>
                 <a:cs typeface="Noto Sans CJK KR" pitchFamily="34" charset="-120"/>
               </a:rPr>
-              <a:t>Guard Tick</a:t>
+              <a:t>Guard Tick의 역할</a:t>
             </a:r>
             <a:endParaRPr lang="en-US" sz="2000" dirty="0"/>
           </a:p>
@@ -2886,7 +2886,7 @@
                 <a:ea typeface="Noto Sans CJK KR" pitchFamily="34" charset="-122"/>
                 <a:cs typeface="Noto Sans CJK KR" pitchFamily="34" charset="-120"/>
               </a:rPr>
-              <a:t>슬롯 경계마다 여유 시간을 두어 인접 슬롯 침범을 방지</a:t>
+              <a:t>인접 슬롯의 절반씩이 경계에서 맞물려 슬롯 침범을 방지</a:t>
             </a:r>
             <a:endParaRPr lang="en-US" sz="2000" dirty="0"/>
           </a:p>
@@ -2907,8 +2907,8 @@
         </p:blipFill>
         <p:spPr>
           <a:xfrm>
-            <a:off x="640080" y="3611880"/>
-            <a:ext cx="7863840" cy="613678"/>
+            <a:off x="548640" y="3703320"/>
+            <a:ext cx="8046720" cy="482393"/>
           </a:xfrm>
           <a:prstGeom prst="rect">
             <a:avLst/>
@@ -2923,7 +2923,7 @@
         </p:nvSpPr>
         <p:spPr>
           <a:xfrm>
-            <a:off x="548640" y="4298710"/>
+            <a:off x="548640" y="4258865"/>
             <a:ext cx="8046720" cy="228600"/>
           </a:xfrm>
           <a:prstGeom prst="rect">
@@ -2948,7 +2948,7 @@
                 <a:ea typeface="Noto Sans CJK KR" pitchFamily="34" charset="-122"/>
                 <a:cs typeface="Noto Sans CJK KR" pitchFamily="34" charset="-120"/>
               </a:rPr>
-              <a:t>슬롯/가드틱 타임라인 (Slot 0 ... Slot N → Sync)</a:t>
+              <a:t>Sync → [½G·데이터·½G] × (Slot 0...N) → Sync</a:t>
             </a:r>
             <a:endParaRPr lang="en-US" sz="900" dirty="0"/>
           </a:p>

--- a/section2_tdma_protocol.pptx
+++ b/section2_tdma_protocol.pptx
@@ -1826,7 +1826,7 @@
         <p:spPr>
           <a:xfrm>
             <a:off x="548640" y="1234440"/>
-            <a:ext cx="4023360" cy="3200400"/>
+            <a:ext cx="3931920" cy="2971800"/>
           </a:xfrm>
           <a:prstGeom prst="rect">
             <a:avLst/>
@@ -1840,13 +1840,13 @@
           <a:p>
             <a:pPr marL="342900" indent="-342900">
               <a:spcAft>
-                <a:spcPts val="1200"/>
+                <a:spcPts val="1000"/>
               </a:spcAft>
               <a:buSzPct val="100000"/>
               <a:buChar char="•"/>
             </a:pPr>
             <a:r>
-              <a:rPr lang="en-US" sz="2000" dirty="0">
+              <a:rPr lang="en-US" sz="1900" dirty="0">
                 <a:solidFill>
                   <a:srgbClr val="222222"/>
                 </a:solidFill>
@@ -1856,18 +1856,18 @@
               </a:rPr>
               <a:t>연결 구조</a:t>
             </a:r>
-            <a:endParaRPr lang="en-US" sz="2000" dirty="0"/>
+            <a:endParaRPr lang="en-US" sz="1900" dirty="0"/>
           </a:p>
           <a:p>
             <a:pPr lvl="1" marL="685800" indent="-342900">
               <a:spcAft>
-                <a:spcPts val="800"/>
+                <a:spcPts val="600"/>
               </a:spcAft>
               <a:buSzPct val="100000"/>
               <a:buChar char="•"/>
             </a:pPr>
             <a:r>
-              <a:rPr lang="en-US" sz="1700" dirty="0">
+              <a:rPr lang="en-US" sz="1600" dirty="0">
                 <a:solidFill>
                   <a:srgbClr val="444444"/>
                 </a:solidFill>
@@ -1877,18 +1877,18 @@
               </a:rPr>
               <a:t>GPIO 단자 기반 공유 버스, Master 1 : Slave N (NODE_CNT)</a:t>
             </a:r>
-            <a:endParaRPr lang="en-US" sz="2000" dirty="0"/>
+            <a:endParaRPr lang="en-US" sz="1900" dirty="0"/>
           </a:p>
           <a:p>
             <a:pPr marL="342900" indent="-342900">
               <a:spcAft>
-                <a:spcPts val="1200"/>
+                <a:spcPts val="1000"/>
               </a:spcAft>
               <a:buSzPct val="100000"/>
               <a:buChar char="•"/>
             </a:pPr>
             <a:r>
-              <a:rPr lang="en-US" sz="2000" dirty="0">
+              <a:rPr lang="en-US" sz="1900" dirty="0">
                 <a:solidFill>
                   <a:srgbClr val="222222"/>
                 </a:solidFill>
@@ -1898,18 +1898,18 @@
               </a:rPr>
               <a:t>라인 코딩</a:t>
             </a:r>
-            <a:endParaRPr lang="en-US" sz="2000" dirty="0"/>
+            <a:endParaRPr lang="en-US" sz="1900" dirty="0"/>
           </a:p>
           <a:p>
             <a:pPr lvl="1" marL="685800" indent="-342900">
               <a:spcAft>
-                <a:spcPts val="800"/>
+                <a:spcPts val="600"/>
               </a:spcAft>
               <a:buSzPct val="100000"/>
               <a:buChar char="•"/>
             </a:pPr>
             <a:r>
-              <a:rPr lang="en-US" sz="1700" dirty="0">
+              <a:rPr lang="en-US" sz="1600" dirty="0">
                 <a:solidFill>
                   <a:srgbClr val="444444"/>
                 </a:solidFill>
@@ -1919,18 +1919,18 @@
               </a:rPr>
               <a:t>NRZ (Non-Return-to-Zero)</a:t>
             </a:r>
-            <a:endParaRPr lang="en-US" sz="2000" dirty="0"/>
+            <a:endParaRPr lang="en-US" sz="1900" dirty="0"/>
           </a:p>
           <a:p>
             <a:pPr marL="342900" indent="-342900">
               <a:spcAft>
-                <a:spcPts val="1200"/>
+                <a:spcPts val="1000"/>
               </a:spcAft>
               <a:buSzPct val="100000"/>
               <a:buChar char="•"/>
             </a:pPr>
             <a:r>
-              <a:rPr lang="en-US" sz="2000" dirty="0">
+              <a:rPr lang="en-US" sz="1900" dirty="0">
                 <a:solidFill>
                   <a:srgbClr val="222222"/>
                 </a:solidFill>
@@ -1940,7 +1940,7 @@
               </a:rPr>
               <a:t>배선</a:t>
             </a:r>
-            <a:endParaRPr lang="en-US" sz="2000" dirty="0"/>
+            <a:endParaRPr lang="en-US" sz="1900" dirty="0"/>
           </a:p>
           <a:p>
             <a:pPr lvl="1" marL="685800" indent="-342900">
@@ -1948,7 +1948,7 @@
               <a:buChar char="•"/>
             </a:pPr>
             <a:r>
-              <a:rPr lang="en-US" sz="1700" dirty="0">
+              <a:rPr lang="en-US" sz="1600" dirty="0">
                 <a:solidFill>
                   <a:srgbClr val="444444"/>
                 </a:solidFill>
@@ -1956,9 +1956,9 @@
                 <a:ea typeface="Noto Sans CJK KR" pitchFamily="34" charset="-122"/>
                 <a:cs typeface="Noto Sans CJK KR" pitchFamily="34" charset="-120"/>
               </a:rPr>
-              <a:t>TX 1선 + RX 1선 + 공통 GND = 3선, 각 선은 단일 드라이버 단방향 — 슬레이브는 자신의 슬롯에만 TX 구동</a:t>
-            </a:r>
-            <a:endParaRPr lang="en-US" sz="2000" dirty="0"/>
+              <a:t>TX 1선 + RX 1선 + 공통 GND = 3선 — 슬레이브는 자신의 슬롯에만 TX 구동</a:t>
+            </a:r>
+            <a:endParaRPr lang="en-US" sz="1900" dirty="0"/>
           </a:p>
         </p:txBody>
       </p:sp>
@@ -1977,8 +1977,8 @@
         </p:blipFill>
         <p:spPr>
           <a:xfrm>
-            <a:off x="4937760" y="1280160"/>
-            <a:ext cx="3566160" cy="2985116"/>
+            <a:off x="4663440" y="1280160"/>
+            <a:ext cx="3931920" cy="3291281"/>
           </a:xfrm>
           <a:prstGeom prst="rect">
             <a:avLst/>
@@ -1993,8 +1993,8 @@
         </p:nvSpPr>
         <p:spPr>
           <a:xfrm>
-            <a:off x="4937760" y="4338428"/>
-            <a:ext cx="3566160" cy="274320"/>
+            <a:off x="4663440" y="4644593"/>
+            <a:ext cx="3931920" cy="274320"/>
           </a:xfrm>
           <a:prstGeom prst="rect">
             <a:avLst/>
@@ -2136,7 +2136,7 @@
         <p:spPr>
           <a:xfrm>
             <a:off x="548640" y="1234440"/>
-            <a:ext cx="8046720" cy="2103120"/>
+            <a:ext cx="8046720" cy="1874520"/>
           </a:xfrm>
           <a:prstGeom prst="rect">
             <a:avLst/>
@@ -2150,13 +2150,13 @@
           <a:p>
             <a:pPr marL="342900" indent="-342900">
               <a:spcAft>
-                <a:spcPts val="1000"/>
+                <a:spcPts val="800"/>
               </a:spcAft>
               <a:buSzPct val="100000"/>
               <a:buChar char="•"/>
             </a:pPr>
             <a:r>
-              <a:rPr lang="en-US" sz="2000" dirty="0">
+              <a:rPr lang="en-US" sz="1900" dirty="0">
                 <a:solidFill>
                   <a:srgbClr val="222222"/>
                 </a:solidFill>
@@ -2166,10 +2166,31 @@
               </a:rPr>
               <a:t>필드 구성 (총 50비트)</a:t>
             </a:r>
-            <a:endParaRPr lang="en-US" sz="2000" dirty="0"/>
+            <a:endParaRPr lang="en-US" sz="1900" dirty="0"/>
           </a:p>
           <a:p>
             <a:pPr lvl="1" marL="685800" indent="-342900">
+              <a:spcAft>
+                <a:spcPts val="600"/>
+              </a:spcAft>
+              <a:buSzPct val="100000"/>
+              <a:buChar char="•"/>
+            </a:pPr>
+            <a:r>
+              <a:rPr lang="en-US" sz="1600" dirty="0">
+                <a:solidFill>
+                  <a:srgbClr val="444444"/>
+                </a:solidFill>
+                <a:latin typeface="Noto Sans CJK KR" pitchFamily="34" charset="0"/>
+                <a:ea typeface="Noto Sans CJK KR" pitchFamily="34" charset="-122"/>
+                <a:cs typeface="Noto Sans CJK KR" pitchFamily="34" charset="-120"/>
+              </a:rPr>
+              <a:t>preamble(8, 0xAA) + slot_id(3) + payload(32) + hamming parity(7)</a:t>
+            </a:r>
+            <a:endParaRPr lang="en-US" sz="1900" dirty="0"/>
+          </a:p>
+          <a:p>
+            <a:pPr marL="342900" indent="-342900">
               <a:spcAft>
                 <a:spcPts val="800"/>
               </a:spcAft>
@@ -2177,41 +2198,41 @@
               <a:buChar char="•"/>
             </a:pPr>
             <a:r>
-              <a:rPr lang="en-US" sz="1700" dirty="0">
-                <a:solidFill>
-                  <a:srgbClr val="444444"/>
-                </a:solidFill>
-                <a:latin typeface="Noto Sans CJK KR" pitchFamily="34" charset="0"/>
-                <a:ea typeface="Noto Sans CJK KR" pitchFamily="34" charset="-122"/>
-                <a:cs typeface="Noto Sans CJK KR" pitchFamily="34" charset="-120"/>
-              </a:rPr>
-              <a:t>preamble(8, 0xAA) + slot_id(3) + payload(32) + hamming parity(7)</a:t>
-            </a:r>
-            <a:endParaRPr lang="en-US" sz="2000" dirty="0"/>
-          </a:p>
-          <a:p>
-            <a:pPr marL="342900" indent="-342900">
+              <a:rPr lang="en-US" sz="1900" dirty="0">
+                <a:solidFill>
+                  <a:srgbClr val="222222"/>
+                </a:solidFill>
+                <a:latin typeface="Noto Sans CJK KR" pitchFamily="34" charset="0"/>
+                <a:ea typeface="Noto Sans CJK KR" pitchFamily="34" charset="-122"/>
+                <a:cs typeface="Noto Sans CJK KR" pitchFamily="34" charset="-120"/>
+              </a:rPr>
+              <a:t>에러 검출/정정</a:t>
+            </a:r>
+            <a:endParaRPr lang="en-US" sz="1900" dirty="0"/>
+          </a:p>
+          <a:p>
+            <a:pPr lvl="1" marL="685800" indent="-342900">
               <a:spcAft>
-                <a:spcPts val="1000"/>
+                <a:spcPts val="600"/>
               </a:spcAft>
               <a:buSzPct val="100000"/>
               <a:buChar char="•"/>
             </a:pPr>
             <a:r>
-              <a:rPr lang="en-US" sz="2000" dirty="0">
-                <a:solidFill>
-                  <a:srgbClr val="222222"/>
-                </a:solidFill>
-                <a:latin typeface="Noto Sans CJK KR" pitchFamily="34" charset="0"/>
-                <a:ea typeface="Noto Sans CJK KR" pitchFamily="34" charset="-122"/>
-                <a:cs typeface="Noto Sans CJK KR" pitchFamily="34" charset="-120"/>
-              </a:rPr>
-              <a:t>에러 검출/정정</a:t>
-            </a:r>
-            <a:endParaRPr lang="en-US" sz="2000" dirty="0"/>
-          </a:p>
-          <a:p>
-            <a:pPr lvl="1" marL="685800" indent="-342900">
+              <a:rPr lang="en-US" sz="1600" dirty="0">
+                <a:solidFill>
+                  <a:srgbClr val="444444"/>
+                </a:solidFill>
+                <a:latin typeface="Noto Sans CJK KR" pitchFamily="34" charset="0"/>
+                <a:ea typeface="Noto Sans CJK KR" pitchFamily="34" charset="-122"/>
+                <a:cs typeface="Noto Sans CJK KR" pitchFamily="34" charset="-120"/>
+              </a:rPr>
+              <a:t>SEC-DED 방식 — 1비트 에러는 검출 후 정정, 2비트 에러는 검출만 가능</a:t>
+            </a:r>
+            <a:endParaRPr lang="en-US" sz="1900" dirty="0"/>
+          </a:p>
+          <a:p>
+            <a:pPr marL="342900" indent="-342900">
               <a:spcAft>
                 <a:spcPts val="800"/>
               </a:spcAft>
@@ -2219,28 +2240,7 @@
               <a:buChar char="•"/>
             </a:pPr>
             <a:r>
-              <a:rPr lang="en-US" sz="1700" dirty="0">
-                <a:solidFill>
-                  <a:srgbClr val="444444"/>
-                </a:solidFill>
-                <a:latin typeface="Noto Sans CJK KR" pitchFamily="34" charset="0"/>
-                <a:ea typeface="Noto Sans CJK KR" pitchFamily="34" charset="-122"/>
-                <a:cs typeface="Noto Sans CJK KR" pitchFamily="34" charset="-120"/>
-              </a:rPr>
-              <a:t>SEC-DED 방식 — 1비트 에러는 검출 후 정정, 2비트 에러는 검출만 가능</a:t>
-            </a:r>
-            <a:endParaRPr lang="en-US" sz="2000" dirty="0"/>
-          </a:p>
-          <a:p>
-            <a:pPr marL="342900" indent="-342900">
-              <a:spcAft>
-                <a:spcPts val="1000"/>
-              </a:spcAft>
-              <a:buSzPct val="100000"/>
-              <a:buChar char="•"/>
-            </a:pPr>
-            <a:r>
-              <a:rPr lang="en-US" sz="2000" dirty="0">
+              <a:rPr lang="en-US" sz="1900" dirty="0">
                 <a:solidFill>
                   <a:srgbClr val="222222"/>
                 </a:solidFill>
@@ -2250,7 +2250,7 @@
               </a:rPr>
               <a:t>slot_id의 의미</a:t>
             </a:r>
-            <a:endParaRPr lang="en-US" sz="2000" dirty="0"/>
+            <a:endParaRPr lang="en-US" sz="1900" dirty="0"/>
           </a:p>
           <a:p>
             <a:pPr lvl="1" marL="685800" indent="-342900">
@@ -2258,7 +2258,7 @@
               <a:buChar char="•"/>
             </a:pPr>
             <a:r>
-              <a:rPr lang="en-US" sz="1700" dirty="0">
+              <a:rPr lang="en-US" sz="1600" dirty="0">
                 <a:solidFill>
                   <a:srgbClr val="444444"/>
                 </a:solidFill>
@@ -2268,7 +2268,7 @@
               </a:rPr>
               <a:t>슬레이브 고유 식별자가 아니라 TDMA 슬롯 번호로 운용됨</a:t>
             </a:r>
-            <a:endParaRPr lang="en-US" sz="2000" dirty="0"/>
+            <a:endParaRPr lang="en-US" sz="1900" dirty="0"/>
           </a:p>
         </p:txBody>
       </p:sp>
@@ -2287,7 +2287,7 @@
         </p:blipFill>
         <p:spPr>
           <a:xfrm>
-            <a:off x="548640" y="3429000"/>
+            <a:off x="548640" y="3246120"/>
             <a:ext cx="8046720" cy="563270"/>
           </a:xfrm>
           <a:prstGeom prst="rect">
@@ -2303,7 +2303,7 @@
         </p:nvSpPr>
         <p:spPr>
           <a:xfrm>
-            <a:off x="548640" y="4065422"/>
+            <a:off x="548640" y="3900830"/>
             <a:ext cx="8046720" cy="228600"/>
           </a:xfrm>
           <a:prstGeom prst="rect">
@@ -2446,7 +2446,7 @@
         <p:spPr>
           <a:xfrm>
             <a:off x="548640" y="1234440"/>
-            <a:ext cx="8046720" cy="2377440"/>
+            <a:ext cx="8046720" cy="2057400"/>
           </a:xfrm>
           <a:prstGeom prst="rect">
             <a:avLst/>
@@ -2460,13 +2460,13 @@
           <a:p>
             <a:pPr marL="342900" indent="-342900">
               <a:spcAft>
-                <a:spcPts val="1000"/>
+                <a:spcPts val="800"/>
               </a:spcAft>
               <a:buSzPct val="100000"/>
               <a:buChar char="•"/>
             </a:pPr>
             <a:r>
-              <a:rPr lang="en-US" sz="2000" dirty="0">
+              <a:rPr lang="en-US" sz="1900" dirty="0">
                 <a:solidFill>
                   <a:srgbClr val="222222"/>
                 </a:solidFill>
@@ -2476,10 +2476,31 @@
               </a:rPr>
               <a:t>필드 구성</a:t>
             </a:r>
-            <a:endParaRPr lang="en-US" sz="2000" dirty="0"/>
+            <a:endParaRPr lang="en-US" sz="1900" dirty="0"/>
           </a:p>
           <a:p>
             <a:pPr lvl="1" marL="685800" indent="-342900">
+              <a:spcAft>
+                <a:spcPts val="600"/>
+              </a:spcAft>
+              <a:buSzPct val="100000"/>
+              <a:buChar char="•"/>
+            </a:pPr>
+            <a:r>
+              <a:rPr lang="en-US" sz="1600" dirty="0">
+                <a:solidFill>
+                  <a:srgbClr val="444444"/>
+                </a:solidFill>
+                <a:latin typeface="Noto Sans CJK KR" pitchFamily="34" charset="0"/>
+                <a:ea typeface="Noto Sans CJK KR" pitchFamily="34" charset="-122"/>
+                <a:cs typeface="Noto Sans CJK KR" pitchFamily="34" charset="-120"/>
+              </a:rPr>
+              <a:t>preamble(8) + halt_cmd(8) + guard_ticks(10) + reserved(17) + hamming parity(7)</a:t>
+            </a:r>
+            <a:endParaRPr lang="en-US" sz="1900" dirty="0"/>
+          </a:p>
+          <a:p>
+            <a:pPr marL="342900" indent="-342900">
               <a:spcAft>
                 <a:spcPts val="800"/>
               </a:spcAft>
@@ -2487,41 +2508,41 @@
               <a:buChar char="•"/>
             </a:pPr>
             <a:r>
-              <a:rPr lang="en-US" sz="1700" dirty="0">
-                <a:solidFill>
-                  <a:srgbClr val="444444"/>
-                </a:solidFill>
-                <a:latin typeface="Noto Sans CJK KR" pitchFamily="34" charset="0"/>
-                <a:ea typeface="Noto Sans CJK KR" pitchFamily="34" charset="-122"/>
-                <a:cs typeface="Noto Sans CJK KR" pitchFamily="34" charset="-120"/>
-              </a:rPr>
-              <a:t>preamble(8) + halt_cmd(8) + guard_ticks(10) + reserved(17) + hamming parity(7)</a:t>
-            </a:r>
-            <a:endParaRPr lang="en-US" sz="2000" dirty="0"/>
-          </a:p>
-          <a:p>
-            <a:pPr marL="342900" indent="-342900">
+              <a:rPr lang="en-US" sz="1900" dirty="0">
+                <a:solidFill>
+                  <a:srgbClr val="222222"/>
+                </a:solidFill>
+                <a:latin typeface="Noto Sans CJK KR" pitchFamily="34" charset="0"/>
+                <a:ea typeface="Noto Sans CJK KR" pitchFamily="34" charset="-122"/>
+                <a:cs typeface="Noto Sans CJK KR" pitchFamily="34" charset="-120"/>
+              </a:rPr>
+              <a:t>halt_cmd</a:t>
+            </a:r>
+            <a:endParaRPr lang="en-US" sz="1900" dirty="0"/>
+          </a:p>
+          <a:p>
+            <a:pPr lvl="1" marL="685800" indent="-342900">
               <a:spcAft>
-                <a:spcPts val="1000"/>
+                <a:spcPts val="600"/>
               </a:spcAft>
               <a:buSzPct val="100000"/>
               <a:buChar char="•"/>
             </a:pPr>
             <a:r>
-              <a:rPr lang="en-US" sz="2000" dirty="0">
-                <a:solidFill>
-                  <a:srgbClr val="222222"/>
-                </a:solidFill>
-                <a:latin typeface="Noto Sans CJK KR" pitchFamily="34" charset="0"/>
-                <a:ea typeface="Noto Sans CJK KR" pitchFamily="34" charset="-122"/>
-                <a:cs typeface="Noto Sans CJK KR" pitchFamily="34" charset="-120"/>
-              </a:rPr>
-              <a:t>halt_cmd</a:t>
-            </a:r>
-            <a:endParaRPr lang="en-US" sz="2000" dirty="0"/>
-          </a:p>
-          <a:p>
-            <a:pPr lvl="1" marL="685800" indent="-342900">
+              <a:rPr lang="en-US" sz="1600" dirty="0">
+                <a:solidFill>
+                  <a:srgbClr val="444444"/>
+                </a:solidFill>
+                <a:latin typeface="Noto Sans CJK KR" pitchFamily="34" charset="0"/>
+                <a:ea typeface="Noto Sans CJK KR" pitchFamily="34" charset="-122"/>
+                <a:cs typeface="Noto Sans CJK KR" pitchFamily="34" charset="-120"/>
+              </a:rPr>
+              <a:t>슬레이브별 1비트 마스크 — err_cnt가 임계치(FAULT_TH) 초과 시 해당 비트 set, 고장 슬레이브 중단 명령</a:t>
+            </a:r>
+            <a:endParaRPr lang="en-US" sz="1900" dirty="0"/>
+          </a:p>
+          <a:p>
+            <a:pPr marL="342900" indent="-342900">
               <a:spcAft>
                 <a:spcPts val="800"/>
               </a:spcAft>
@@ -2529,28 +2550,7 @@
               <a:buChar char="•"/>
             </a:pPr>
             <a:r>
-              <a:rPr lang="en-US" sz="1700" dirty="0">
-                <a:solidFill>
-                  <a:srgbClr val="444444"/>
-                </a:solidFill>
-                <a:latin typeface="Noto Sans CJK KR" pitchFamily="34" charset="0"/>
-                <a:ea typeface="Noto Sans CJK KR" pitchFamily="34" charset="-122"/>
-                <a:cs typeface="Noto Sans CJK KR" pitchFamily="34" charset="-120"/>
-              </a:rPr>
-              <a:t>슬레이브별 1비트 마스크 — err_cnt가 임계치(FAULT_TH) 초과 시 해당 비트 set, 고장 슬레이브 중단 명령</a:t>
-            </a:r>
-            <a:endParaRPr lang="en-US" sz="2000" dirty="0"/>
-          </a:p>
-          <a:p>
-            <a:pPr marL="342900" indent="-342900">
-              <a:spcAft>
-                <a:spcPts val="1000"/>
-              </a:spcAft>
-              <a:buSzPct val="100000"/>
-              <a:buChar char="•"/>
-            </a:pPr>
-            <a:r>
-              <a:rPr lang="en-US" sz="2000" dirty="0">
+              <a:rPr lang="en-US" sz="1900" dirty="0">
                 <a:solidFill>
                   <a:srgbClr val="222222"/>
                 </a:solidFill>
@@ -2560,7 +2560,7 @@
               </a:rPr>
               <a:t>에러 검출/정정</a:t>
             </a:r>
-            <a:endParaRPr lang="en-US" sz="2000" dirty="0"/>
+            <a:endParaRPr lang="en-US" sz="1900" dirty="0"/>
           </a:p>
           <a:p>
             <a:pPr lvl="1" marL="685800" indent="-342900">
@@ -2568,7 +2568,7 @@
               <a:buChar char="•"/>
             </a:pPr>
             <a:r>
-              <a:rPr lang="en-US" sz="1700" dirty="0">
+              <a:rPr lang="en-US" sz="1600" dirty="0">
                 <a:solidFill>
                   <a:srgbClr val="444444"/>
                 </a:solidFill>
@@ -2578,7 +2578,7 @@
               </a:rPr>
               <a:t>Slave 프레임과 동일한 SEC-DED 방식 적용</a:t>
             </a:r>
-            <a:endParaRPr lang="en-US" sz="2000" dirty="0"/>
+            <a:endParaRPr lang="en-US" sz="1900" dirty="0"/>
           </a:p>
         </p:txBody>
       </p:sp>
@@ -2597,7 +2597,7 @@
         </p:blipFill>
         <p:spPr>
           <a:xfrm>
-            <a:off x="548640" y="3611880"/>
+            <a:off x="548640" y="3383280"/>
             <a:ext cx="8046720" cy="563270"/>
           </a:xfrm>
           <a:prstGeom prst="rect">
@@ -2613,7 +2613,7 @@
         </p:nvSpPr>
         <p:spPr>
           <a:xfrm>
-            <a:off x="548640" y="4248302"/>
+            <a:off x="548640" y="4037990"/>
             <a:ext cx="8046720" cy="228600"/>
           </a:xfrm>
           <a:prstGeom prst="rect">
@@ -2756,7 +2756,7 @@
         <p:spPr>
           <a:xfrm>
             <a:off x="548640" y="1234440"/>
-            <a:ext cx="8046720" cy="2377440"/>
+            <a:ext cx="8046720" cy="1371600"/>
           </a:xfrm>
           <a:prstGeom prst="rect">
             <a:avLst/>
@@ -2770,13 +2770,13 @@
           <a:p>
             <a:pPr marL="342900" indent="-342900">
               <a:spcAft>
-                <a:spcPts val="1000"/>
+                <a:spcPts val="600"/>
               </a:spcAft>
               <a:buSzPct val="100000"/>
               <a:buChar char="•"/>
             </a:pPr>
             <a:r>
-              <a:rPr lang="en-US" sz="2000" dirty="0">
+              <a:rPr lang="en-US" sz="1800" dirty="0">
                 <a:solidFill>
                   <a:srgbClr val="222222"/>
                 </a:solidFill>
@@ -2786,18 +2786,18 @@
               </a:rPr>
               <a:t>Sync 기준점</a:t>
             </a:r>
-            <a:endParaRPr lang="en-US" sz="2000" dirty="0"/>
+            <a:endParaRPr lang="en-US" sz="1800" dirty="0"/>
           </a:p>
           <a:p>
             <a:pPr lvl="1" marL="685800" indent="-342900">
               <a:spcAft>
-                <a:spcPts val="800"/>
+                <a:spcPts val="400"/>
               </a:spcAft>
               <a:buSzPct val="100000"/>
               <a:buChar char="•"/>
             </a:pPr>
             <a:r>
-              <a:rPr lang="en-US" sz="1700" dirty="0">
+              <a:rPr lang="en-US" sz="1500" dirty="0">
                 <a:solidFill>
                   <a:srgbClr val="444444"/>
                 </a:solidFill>
@@ -2805,20 +2805,20 @@
                 <a:ea typeface="Noto Sans CJK KR" pitchFamily="34" charset="-122"/>
                 <a:cs typeface="Noto Sans CJK KR" pitchFamily="34" charset="-120"/>
               </a:rPr>
-              <a:t>Master는 매 사이클의 마지막 슬롯에서 sync 프레임을 전송, 이를 다음 사이클의 슬롯 계산 기준점으로 사용</a:t>
-            </a:r>
-            <a:endParaRPr lang="en-US" sz="2000" dirty="0"/>
+              <a:t>Master가 매 사이클 마지막 슬롯에서 전송한 sync를 다음 사이클 슬롯 계산 기준점으로 사용</a:t>
+            </a:r>
+            <a:endParaRPr lang="en-US" sz="1800" dirty="0"/>
           </a:p>
           <a:p>
             <a:pPr marL="342900" indent="-342900">
               <a:spcAft>
-                <a:spcPts val="1000"/>
+                <a:spcPts val="600"/>
               </a:spcAft>
               <a:buSzPct val="100000"/>
               <a:buChar char="•"/>
             </a:pPr>
             <a:r>
-              <a:rPr lang="en-US" sz="2000" dirty="0">
+              <a:rPr lang="en-US" sz="1800" dirty="0">
                 <a:solidFill>
                   <a:srgbClr val="222222"/>
                 </a:solidFill>
@@ -2828,18 +2828,18 @@
               </a:rPr>
               <a:t>슬롯 내부 구조</a:t>
             </a:r>
-            <a:endParaRPr lang="en-US" sz="2000" dirty="0"/>
+            <a:endParaRPr lang="en-US" sz="1800" dirty="0"/>
           </a:p>
           <a:p>
             <a:pPr lvl="1" marL="685800" indent="-342900">
               <a:spcAft>
-                <a:spcPts val="800"/>
+                <a:spcPts val="400"/>
               </a:spcAft>
               <a:buSzPct val="100000"/>
               <a:buChar char="•"/>
             </a:pPr>
             <a:r>
-              <a:rPr lang="en-US" sz="1700" dirty="0">
+              <a:rPr lang="en-US" sz="1500" dirty="0">
                 <a:solidFill>
                   <a:srgbClr val="444444"/>
                 </a:solidFill>
@@ -2847,20 +2847,20 @@
                 <a:ea typeface="Noto Sans CJK KR" pitchFamily="34" charset="-122"/>
                 <a:cs typeface="Noto Sans CJK KR" pitchFamily="34" charset="-120"/>
               </a:rPr>
-              <a:t>각 슬롯은 ½ guard tick 대기 → 데이터 전송 → ½ guard tick 대기 순으로 진행</a:t>
-            </a:r>
-            <a:endParaRPr lang="en-US" sz="2000" dirty="0"/>
+              <a:t>½ guard tick 대기 → 데이터 전송 → ½ guard tick 대기</a:t>
+            </a:r>
+            <a:endParaRPr lang="en-US" sz="1800" dirty="0"/>
           </a:p>
           <a:p>
             <a:pPr marL="342900" indent="-342900">
               <a:spcAft>
-                <a:spcPts val="1000"/>
+                <a:spcPts val="600"/>
               </a:spcAft>
               <a:buSzPct val="100000"/>
               <a:buChar char="•"/>
             </a:pPr>
             <a:r>
-              <a:rPr lang="en-US" sz="2000" dirty="0">
+              <a:rPr lang="en-US" sz="1800" dirty="0">
                 <a:solidFill>
                   <a:srgbClr val="222222"/>
                 </a:solidFill>
@@ -2870,7 +2870,7 @@
               </a:rPr>
               <a:t>Guard Tick의 역할</a:t>
             </a:r>
-            <a:endParaRPr lang="en-US" sz="2000" dirty="0"/>
+            <a:endParaRPr lang="en-US" sz="1800" dirty="0"/>
           </a:p>
           <a:p>
             <a:pPr lvl="1" marL="685800" indent="-342900">
@@ -2878,7 +2878,7 @@
               <a:buChar char="•"/>
             </a:pPr>
             <a:r>
-              <a:rPr lang="en-US" sz="1700" dirty="0">
+              <a:rPr lang="en-US" sz="1500" dirty="0">
                 <a:solidFill>
                   <a:srgbClr val="444444"/>
                 </a:solidFill>
@@ -2886,9 +2886,9 @@
                 <a:ea typeface="Noto Sans CJK KR" pitchFamily="34" charset="-122"/>
                 <a:cs typeface="Noto Sans CJK KR" pitchFamily="34" charset="-120"/>
               </a:rPr>
-              <a:t>인접 슬롯의 절반씩이 경계에서 맞물려 슬롯 침범을 방지</a:t>
-            </a:r>
-            <a:endParaRPr lang="en-US" sz="2000" dirty="0"/>
+              <a:t>인접 슬롯의 절반씩이 경계에서 맞물려 슬롯 침범 방지</a:t>
+            </a:r>
+            <a:endParaRPr lang="en-US" sz="1800" dirty="0"/>
           </a:p>
         </p:txBody>
       </p:sp>
@@ -2907,8 +2907,8 @@
         </p:blipFill>
         <p:spPr>
           <a:xfrm>
-            <a:off x="548640" y="3703320"/>
-            <a:ext cx="8046720" cy="482393"/>
+            <a:off x="1371600" y="2743200"/>
+            <a:ext cx="6400800" cy="2081893"/>
           </a:xfrm>
           <a:prstGeom prst="rect">
             <a:avLst/>
@@ -2923,8 +2923,8 @@
         </p:nvSpPr>
         <p:spPr>
           <a:xfrm>
-            <a:off x="548640" y="4258865"/>
-            <a:ext cx="8046720" cy="228600"/>
+            <a:off x="1371600" y="4916533"/>
+            <a:ext cx="6400800" cy="228600"/>
           </a:xfrm>
           <a:prstGeom prst="rect">
             <a:avLst/>
@@ -2948,7 +2948,7 @@
                 <a:ea typeface="Noto Sans CJK KR" pitchFamily="34" charset="-122"/>
                 <a:cs typeface="Noto Sans CJK KR" pitchFamily="34" charset="-120"/>
               </a:rPr>
-              <a:t>Sync → [½G·데이터·½G] × (Slot 0...N) → Sync</a:t>
+              <a:t>Sync → [½G · 데이터 · ½G] × (Slot 0...N) → Sync</a:t>
             </a:r>
             <a:endParaRPr lang="en-US" sz="900" dirty="0"/>
           </a:p>

--- a/section2_tdma_protocol.pptx
+++ b/section2_tdma_protocol.pptx
@@ -1956,7 +1956,7 @@
                 <a:ea typeface="Noto Sans CJK KR" pitchFamily="34" charset="-122"/>
                 <a:cs typeface="Noto Sans CJK KR" pitchFamily="34" charset="-120"/>
               </a:rPr>
-              <a:t>TX 1선 + RX 1선 + 공통 GND = 3선 — 슬레이브는 자신의 슬롯에만 TX 구동</a:t>
+              <a:t>TX 1선 + RX 1선 + 공통 GND = 3선 — Slave는 자신의 슬롯에만 TX 구동</a:t>
             </a:r>
             <a:endParaRPr lang="en-US" sz="1900" dirty="0"/>
           </a:p>
@@ -2266,7 +2266,7 @@
                 <a:ea typeface="Noto Sans CJK KR" pitchFamily="34" charset="-122"/>
                 <a:cs typeface="Noto Sans CJK KR" pitchFamily="34" charset="-120"/>
               </a:rPr>
-              <a:t>슬레이브 고유 식별자가 아니라 TDMA 슬롯 번호로 운용됨</a:t>
+              <a:t>Slave 고유 식별자가 아니라 TDMA 슬롯 번호로 운용됨</a:t>
             </a:r>
             <a:endParaRPr lang="en-US" sz="1900" dirty="0"/>
           </a:p>
@@ -2537,7 +2537,7 @@
                 <a:ea typeface="Noto Sans CJK KR" pitchFamily="34" charset="-122"/>
                 <a:cs typeface="Noto Sans CJK KR" pitchFamily="34" charset="-120"/>
               </a:rPr>
-              <a:t>슬레이브별 1비트 마스크 — err_cnt가 임계치(FAULT_TH) 초과 시 해당 비트 set, 고장 슬레이브 중단 명령</a:t>
+              <a:t>Slave별 1비트 마스크 — err_cnt가 임계치(FAULT_TH) 초과 시 해당 비트 set, 고장 Slave 중단 명령</a:t>
             </a:r>
             <a:endParaRPr lang="en-US" sz="1900" dirty="0"/>
           </a:p>

--- a/section2_tdma_protocol.pptx
+++ b/section2_tdma_protocol.pptx
@@ -1481,7 +1481,7 @@
                 <a:ea typeface="Noto Sans CJK KR" pitchFamily="34" charset="-122"/>
                 <a:cs typeface="Noto Sans CJK KR" pitchFamily="34" charset="-120"/>
               </a:rPr>
-              <a:t>OSI 7계층을 단축한 TDMA 자체 계층 구조</a:t>
+              <a:t>프레임 구조부터 동기화, 흐름 제어까지 통신 규약을 설계한다</a:t>
             </a:r>
             <a:endParaRPr lang="en-US" sz="2000" dirty="0"/>
           </a:p>

--- a/section2_tdma_protocol.pptx
+++ b/section2_tdma_protocol.pptx
@@ -12,9 +12,10 @@
     <p:sldId id="260" r:id="rId6"/>
     <p:sldId id="261" r:id="rId7"/>
     <p:sldId id="262" r:id="rId8"/>
+    <p:sldId id="263" r:id="rId9"/>
   </p:sldIdLst>
   <p:notesMasterIdLst>
-    <p:notesMasterId r:id="rId9"/>
+    <p:notesMasterId r:id="rId10"/>
   </p:notesMasterIdLst>
   <p:sldSz cx="9144000" cy="5143500"/>
   <p:notesSz cx="5143500" cy="9144000"/>
@@ -1060,6 +1061,94 @@
             <a:fld id="{F7021451-1387-4CA6-816F-3879F97B5CBC}" type="slidenum">
               <a:rPr lang="en-US"/>
               <a:t>7</a:t>
+            </a:fld>
+            <a:endParaRPr lang="en-US"/>
+          </a:p>
+        </p:txBody>
+      </p:sp>
+    </p:spTree>
+    <p:extLst>
+      <p:ext uri="{BB962C8B-B14F-4D97-AF65-F5344CB8AC3E}">
+        <p14:creationId xmlns:p14="http://schemas.microsoft.com/office/powerpoint/2010/main" val="1024086991"/>
+      </p:ext>
+    </p:extLst>
+  </p:cSld>
+  <p:clrMapOvr>
+    <a:masterClrMapping/>
+  </p:clrMapOvr>
+</p:notes>
+</file>
+
+<file path=ppt/notesSlides/notesSlide8.xml><?xml version="1.0" encoding="utf-8"?>
+<p:notes xmlns:a="http://schemas.openxmlformats.org/drawingml/2006/main" xmlns:r="http://schemas.openxmlformats.org/officeDocument/2006/relationships" xmlns:p="http://schemas.openxmlformats.org/presentationml/2006/main">
+  <p:cSld>
+    <p:spTree>
+      <p:nvGrpSpPr>
+        <p:cNvPr id="1" name=""/>
+        <p:cNvGrpSpPr/>
+        <p:nvPr/>
+      </p:nvGrpSpPr>
+      <p:grpSpPr>
+        <a:xfrm>
+          <a:off x="0" y="0"/>
+          <a:ext cx="0" cy="0"/>
+          <a:chOff x="0" y="0"/>
+          <a:chExt cx="0" cy="0"/>
+        </a:xfrm>
+      </p:grpSpPr>
+      <p:sp>
+        <p:nvSpPr>
+          <p:cNvPr id="2" name="Slide Image Placeholder 1"/>
+          <p:cNvSpPr>
+            <a:spLocks noGrp="1" noRot="1" noChangeAspect="1"/>
+          </p:cNvSpPr>
+          <p:nvPr>
+            <p:ph type="sldImg"/>
+          </p:nvPr>
+        </p:nvSpPr>
+        <p:spPr/>
+      </p:sp>
+      <p:sp>
+        <p:nvSpPr>
+          <p:cNvPr id="3" name="Notes Placeholder 2"/>
+          <p:cNvSpPr>
+            <a:spLocks noGrp="1"/>
+          </p:cNvSpPr>
+          <p:nvPr>
+            <p:ph type="body" idx="1"/>
+          </p:nvPr>
+        </p:nvSpPr>
+        <p:spPr/>
+        <p:txBody>
+          <a:bodyPr/>
+          <a:lstStyle/>
+          <a:p>
+            <a:r>
+              <a:rPr lang="en-US" dirty="0"/>
+              <a:t/>
+            </a:r>
+            <a:endParaRPr lang="en-US" dirty="0"/>
+          </a:p>
+        </p:txBody>
+      </p:sp>
+      <p:sp>
+        <p:nvSpPr>
+          <p:cNvPr id="4" name="Slide Number Placeholder 3"/>
+          <p:cNvSpPr>
+            <a:spLocks noGrp="1"/>
+          </p:cNvSpPr>
+          <p:nvPr>
+            <p:ph type="sldNum" sz="quarter" idx="10"/>
+          </p:nvPr>
+        </p:nvSpPr>
+        <p:spPr/>
+        <p:txBody>
+          <a:bodyPr/>
+          <a:lstStyle/>
+          <a:p>
+            <a:fld id="{F7021451-1387-4CA6-816F-3879F97B5CBC}" type="slidenum">
+              <a:rPr lang="en-US"/>
+              <a:t>8</a:t>
             </a:fld>
             <a:endParaRPr lang="en-US"/>
           </a:p>
@@ -3051,6 +3140,254 @@
                 <a:ea typeface="Noto Sans CJK KR" pitchFamily="34" charset="-122"/>
                 <a:cs typeface="Noto Sans CJK KR" pitchFamily="34" charset="-120"/>
               </a:rPr>
+              <a:t>DLL - 클럭 동기</a:t>
+            </a:r>
+            <a:endParaRPr lang="en-US" sz="3600" dirty="0"/>
+          </a:p>
+        </p:txBody>
+      </p:sp>
+      <p:sp>
+        <p:nvSpPr>
+          <p:cNvPr id="3" name="Text 1"/>
+          <p:cNvSpPr/>
+          <p:nvPr/>
+        </p:nvSpPr>
+        <p:spPr>
+          <a:xfrm>
+            <a:off x="548640" y="1234440"/>
+            <a:ext cx="8046720" cy="2971800"/>
+          </a:xfrm>
+          <a:prstGeom prst="rect">
+            <a:avLst/>
+          </a:prstGeom>
+          <a:noFill/>
+          <a:ln/>
+        </p:spPr>
+        <p:txBody>
+          <a:bodyPr wrap="square" rtlCol="0" anchor="t"/>
+          <a:lstStyle/>
+          <a:p>
+            <a:pPr marL="342900" indent="-342900">
+              <a:spcAft>
+                <a:spcPts val="1200"/>
+              </a:spcAft>
+              <a:buSzPct val="100000"/>
+              <a:buChar char="•"/>
+            </a:pPr>
+            <a:r>
+              <a:rPr lang="en-US" sz="2000" dirty="0">
+                <a:solidFill>
+                  <a:srgbClr val="222222"/>
+                </a:solidFill>
+                <a:latin typeface="Noto Sans CJK KR" pitchFamily="34" charset="0"/>
+                <a:ea typeface="Noto Sans CJK KR" pitchFamily="34" charset="-122"/>
+                <a:cs typeface="Noto Sans CJK KR" pitchFamily="34" charset="-120"/>
+              </a:rPr>
+              <a:t>Master·Slave는 클럭을 공유하지 않음</a:t>
+            </a:r>
+            <a:endParaRPr lang="en-US" sz="2000" dirty="0"/>
+          </a:p>
+          <a:p>
+            <a:pPr lvl="1" marL="685800" indent="-342900">
+              <a:spcAft>
+                <a:spcPts val="800"/>
+              </a:spcAft>
+              <a:buSzPct val="100000"/>
+              <a:buChar char="•"/>
+            </a:pPr>
+            <a:r>
+              <a:rPr lang="en-US" sz="1700" dirty="0">
+                <a:solidFill>
+                  <a:srgbClr val="444444"/>
+                </a:solidFill>
+                <a:latin typeface="Noto Sans CJK KR" pitchFamily="34" charset="0"/>
+                <a:ea typeface="Noto Sans CJK KR" pitchFamily="34" charset="-122"/>
+                <a:cs typeface="Noto Sans CJK KR" pitchFamily="34" charset="-120"/>
+              </a:rPr>
+              <a:t>클럭 오차가 통신에 치명적인 방해 요인 — guard tick만으로는 누적 오차를 막을 수 없음</a:t>
+            </a:r>
+            <a:endParaRPr lang="en-US" sz="2000" dirty="0"/>
+          </a:p>
+          <a:p>
+            <a:pPr marL="342900" indent="-342900">
+              <a:spcAft>
+                <a:spcPts val="1200"/>
+              </a:spcAft>
+              <a:buSzPct val="100000"/>
+              <a:buChar char="•"/>
+            </a:pPr>
+            <a:r>
+              <a:rPr lang="en-US" sz="2000" dirty="0">
+                <a:solidFill>
+                  <a:srgbClr val="222222"/>
+                </a:solidFill>
+                <a:latin typeface="Noto Sans CJK KR" pitchFamily="34" charset="0"/>
+                <a:ea typeface="Noto Sans CJK KR" pitchFamily="34" charset="-122"/>
+                <a:cs typeface="Noto Sans CJK KR" pitchFamily="34" charset="-120"/>
+              </a:rPr>
+              <a:t>분주 클럭으로 동일 타이밍 가정</a:t>
+            </a:r>
+            <a:endParaRPr lang="en-US" sz="2000" dirty="0"/>
+          </a:p>
+          <a:p>
+            <a:pPr lvl="1" marL="685800" indent="-342900">
+              <a:spcAft>
+                <a:spcPts val="800"/>
+              </a:spcAft>
+              <a:buSzPct val="100000"/>
+              <a:buChar char="•"/>
+            </a:pPr>
+            <a:r>
+              <a:rPr lang="en-US" sz="1700" dirty="0">
+                <a:solidFill>
+                  <a:srgbClr val="444444"/>
+                </a:solidFill>
+                <a:latin typeface="Noto Sans CJK KR" pitchFamily="34" charset="0"/>
+                <a:ea typeface="Noto Sans CJK KR" pitchFamily="34" charset="-122"/>
+                <a:cs typeface="Noto Sans CJK KR" pitchFamily="34" charset="-120"/>
+              </a:rPr>
+              <a:t>DIV 값을 AXI 레지스터로 설정, Master·Slave 양쪽에 동일한 DIV 값을 쓴다고 가정 — 분주 클럭은 메인 클럭 / (DIV + 1)</a:t>
+            </a:r>
+            <a:endParaRPr lang="en-US" sz="2000" dirty="0"/>
+          </a:p>
+          <a:p>
+            <a:pPr marL="342900" indent="-342900">
+              <a:spcAft>
+                <a:spcPts val="1200"/>
+              </a:spcAft>
+              <a:buSzPct val="100000"/>
+              <a:buChar char="•"/>
+            </a:pPr>
+            <a:r>
+              <a:rPr lang="en-US" sz="2000" dirty="0">
+                <a:solidFill>
+                  <a:srgbClr val="222222"/>
+                </a:solidFill>
+                <a:latin typeface="Noto Sans CJK KR" pitchFamily="34" charset="0"/>
+                <a:ea typeface="Noto Sans CJK KR" pitchFamily="34" charset="-122"/>
+                <a:cs typeface="Noto Sans CJK KR" pitchFamily="34" charset="-120"/>
+              </a:rPr>
+              <a:t>샘플링 방식</a:t>
+            </a:r>
+            <a:endParaRPr lang="en-US" sz="2000" dirty="0"/>
+          </a:p>
+          <a:p>
+            <a:pPr lvl="1" marL="685800" indent="-342900">
+              <a:buSzPct val="100000"/>
+              <a:buChar char="•"/>
+            </a:pPr>
+            <a:r>
+              <a:rPr lang="en-US" sz="1700" dirty="0">
+                <a:solidFill>
+                  <a:srgbClr val="444444"/>
+                </a:solidFill>
+                <a:latin typeface="Noto Sans CJK KR" pitchFamily="34" charset="0"/>
+                <a:ea typeface="Noto Sans CJK KR" pitchFamily="34" charset="-122"/>
+                <a:cs typeface="Noto Sans CJK KR" pitchFamily="34" charset="-120"/>
+              </a:rPr>
+              <a:t>수신 샘플링은 비트 구간의 중간 지점에서 1회만 수행</a:t>
+            </a:r>
+            <a:endParaRPr lang="en-US" sz="2000" dirty="0"/>
+          </a:p>
+        </p:txBody>
+      </p:sp>
+      <p:sp>
+        <p:nvSpPr>
+          <p:cNvPr id="4" name="Text 2"/>
+          <p:cNvSpPr/>
+          <p:nvPr/>
+        </p:nvSpPr>
+        <p:spPr>
+          <a:xfrm>
+            <a:off x="8503920" y="4754880"/>
+            <a:ext cx="457200" cy="274320"/>
+          </a:xfrm>
+          <a:prstGeom prst="rect">
+            <a:avLst/>
+          </a:prstGeom>
+          <a:noFill/>
+          <a:ln/>
+        </p:spPr>
+        <p:txBody>
+          <a:bodyPr wrap="square" rtlCol="0" anchor="ctr"/>
+          <a:lstStyle/>
+          <a:p>
+            <a:pPr algn="r" indent="0" marL="0">
+              <a:buNone/>
+            </a:pPr>
+            <a:r>
+              <a:rPr lang="en-US" sz="1200" dirty="0">
+                <a:solidFill>
+                  <a:srgbClr val="999999"/>
+                </a:solidFill>
+                <a:latin typeface="Noto Sans CJK KR" pitchFamily="34" charset="0"/>
+                <a:ea typeface="Noto Sans CJK KR" pitchFamily="34" charset="-122"/>
+                <a:cs typeface="Noto Sans CJK KR" pitchFamily="34" charset="-120"/>
+              </a:rPr>
+              <a:t>7</a:t>
+            </a:r>
+            <a:endParaRPr lang="en-US" sz="1200" dirty="0"/>
+          </a:p>
+        </p:txBody>
+      </p:sp>
+    </p:spTree>
+  </p:cSld>
+  <p:clrMapOvr>
+    <a:masterClrMapping/>
+  </p:clrMapOvr>
+</p:sld>
+</file>
+
+<file path=ppt/slides/slide8.xml><?xml version="1.0" encoding="utf-8"?>
+<p:sld xmlns:a="http://schemas.openxmlformats.org/drawingml/2006/main" xmlns:r="http://schemas.openxmlformats.org/officeDocument/2006/relationships" xmlns:p="http://schemas.openxmlformats.org/presentationml/2006/main">
+  <p:cSld name="Slide 8">
+    <p:spTree>
+      <p:nvGrpSpPr>
+        <p:cNvPr id="1" name=""/>
+        <p:cNvGrpSpPr/>
+        <p:nvPr/>
+      </p:nvGrpSpPr>
+      <p:grpSpPr>
+        <a:xfrm>
+          <a:off x="0" y="0"/>
+          <a:ext cx="0" cy="0"/>
+          <a:chOff x="0" y="0"/>
+          <a:chExt cx="0" cy="0"/>
+        </a:xfrm>
+      </p:grpSpPr>
+      <p:sp>
+        <p:nvSpPr>
+          <p:cNvPr id="2" name="Text 0"/>
+          <p:cNvSpPr/>
+          <p:nvPr/>
+        </p:nvSpPr>
+        <p:spPr>
+          <a:xfrm>
+            <a:off x="548640" y="274320"/>
+            <a:ext cx="8046720" cy="777240"/>
+          </a:xfrm>
+          <a:prstGeom prst="rect">
+            <a:avLst/>
+          </a:prstGeom>
+          <a:noFill/>
+          <a:ln/>
+        </p:spPr>
+        <p:txBody>
+          <a:bodyPr wrap="square" lIns="0" tIns="0" rIns="0" bIns="0" rtlCol="0" anchor="ctr"/>
+          <a:lstStyle/>
+          <a:p>
+            <a:pPr indent="0" marL="0">
+              <a:buNone/>
+            </a:pPr>
+            <a:r>
+              <a:rPr lang="en-US" sz="3600" b="1" dirty="0">
+                <a:solidFill>
+                  <a:srgbClr val="111111"/>
+                </a:solidFill>
+                <a:latin typeface="Noto Sans CJK KR" pitchFamily="34" charset="0"/>
+                <a:ea typeface="Noto Sans CJK KR" pitchFamily="34" charset="-122"/>
+                <a:cs typeface="Noto Sans CJK KR" pitchFamily="34" charset="-120"/>
+              </a:rPr>
               <a:t>DLL - Flow Control</a:t>
             </a:r>
             <a:endParaRPr lang="en-US" sz="3600" dirty="0"/>
@@ -3258,7 +3595,7 @@
                 <a:ea typeface="Noto Sans CJK KR" pitchFamily="34" charset="-122"/>
                 <a:cs typeface="Noto Sans CJK KR" pitchFamily="34" charset="-120"/>
               </a:rPr>
-              <a:t>7</a:t>
+              <a:t>8</a:t>
             </a:r>
             <a:endParaRPr lang="en-US" sz="1200" dirty="0"/>
           </a:p>
